--- a/3-Master_Plan/re_entry/HEROs_and_PASSes/slides/auto/CHAR_theta_characterization_AUTO.pptx
+++ b/3-Master_Plan/re_entry/HEROs_and_PASSes/slides/auto/CHAR_theta_characterization_AUTO.pptx
@@ -3337,6 +3337,29 @@
               </a:spcAft>
             </a:pPr>
             <a:r>
+              <a:rPr sz="1000" i="1">
+                <a:latin typeface="Cambria Math"/>
+              </a:rPr>
+              <a:t>L</a:t>
+            </a:r>
+            <a:r>
+              <a:rPr sz="800" i="1" baseline="-25000">
+                <a:latin typeface="Cambria Math"/>
+              </a:rPr>
+              <a:t>C</a:t>
+            </a:r>
+            <a:r>
+              <a:rPr sz="1000"/>
+              <a:t> mode: \texttt{crowding\_smooth} (hard \texttt{crowding} also in code)</a:t>
+            </a:r>
+          </a:p>
+          <a:p>
+            <a:pPr>
+              <a:spcAft>
+                <a:spcPts val="0"/>
+              </a:spcAft>
+            </a:pPr>
+            <a:r>
               <a:rPr sz="1000"/>
               <a:t>VISUALIZE = mean </a:t>
             </a:r>
@@ -3501,7 +3524,7 @@
               <a:rPr sz="900" i="1">
                 <a:latin typeface="Cambria Math"/>
               </a:rPr>
-              <a:t>\approx 13</a:t>
+              <a:t>≈ 13</a:t>
             </a:r>
             <a:r>
               <a:rPr sz="900"/>

--- a/3-Master_Plan/re_entry/HEROs_and_PASSes/slides/auto/CHAR_theta_characterization_AUTO.pptx
+++ b/3-Master_Plan/re_entry/HEROs_and_PASSes/slides/auto/CHAR_theta_characterization_AUTO.pptx
@@ -3408,8 +3408,8 @@
         </p:blipFill>
         <p:spPr>
           <a:xfrm>
-            <a:off x="4871457" y="768096"/>
-            <a:ext cx="6810469" cy="3895344"/>
+            <a:off x="4882905" y="768096"/>
+            <a:ext cx="6787572" cy="3895344"/>
           </a:xfrm>
           <a:prstGeom prst="rect">
             <a:avLst/>
